--- a/Reporte 261026.pptx
+++ b/Reporte 261026.pptx
@@ -5,7 +5,7 @@
     <p:sldMasterId id="2147483672" r:id="rId1"/>
   </p:sldMasterIdLst>
   <p:notesMasterIdLst>
-    <p:notesMasterId r:id="rId19"/>
+    <p:notesMasterId r:id="rId18"/>
   </p:notesMasterIdLst>
   <p:sldIdLst>
     <p:sldId id="350" r:id="rId2"/>
@@ -13,33 +13,32 @@
     <p:sldId id="408" r:id="rId4"/>
     <p:sldId id="405" r:id="rId5"/>
     <p:sldId id="406" r:id="rId6"/>
-    <p:sldId id="415" r:id="rId7"/>
-    <p:sldId id="394" r:id="rId8"/>
-    <p:sldId id="395" r:id="rId9"/>
-    <p:sldId id="396" r:id="rId10"/>
-    <p:sldId id="403" r:id="rId11"/>
-    <p:sldId id="388" r:id="rId12"/>
-    <p:sldId id="351" r:id="rId13"/>
-    <p:sldId id="361" r:id="rId14"/>
-    <p:sldId id="412" r:id="rId15"/>
-    <p:sldId id="414" r:id="rId16"/>
-    <p:sldId id="413" r:id="rId17"/>
-    <p:sldId id="280" r:id="rId18"/>
+    <p:sldId id="394" r:id="rId7"/>
+    <p:sldId id="395" r:id="rId8"/>
+    <p:sldId id="396" r:id="rId9"/>
+    <p:sldId id="403" r:id="rId10"/>
+    <p:sldId id="388" r:id="rId11"/>
+    <p:sldId id="351" r:id="rId12"/>
+    <p:sldId id="361" r:id="rId13"/>
+    <p:sldId id="412" r:id="rId14"/>
+    <p:sldId id="414" r:id="rId15"/>
+    <p:sldId id="413" r:id="rId16"/>
+    <p:sldId id="280" r:id="rId17"/>
   </p:sldIdLst>
   <p:sldSz cx="9144000" cy="5143500" type="screen16x9"/>
   <p:notesSz cx="6858000" cy="9144000"/>
   <p:embeddedFontLst>
     <p:embeddedFont>
       <p:font typeface="Montserrat" panose="00000500000000000000" pitchFamily="2" charset="0"/>
-      <p:regular r:id="rId20"/>
-      <p:bold r:id="rId21"/>
-      <p:italic r:id="rId22"/>
-      <p:boldItalic r:id="rId23"/>
+      <p:regular r:id="rId19"/>
+      <p:bold r:id="rId20"/>
+      <p:italic r:id="rId21"/>
+      <p:boldItalic r:id="rId22"/>
     </p:embeddedFont>
     <p:embeddedFont>
       <p:font typeface="Montserrat Black" panose="00000A00000000000000" pitchFamily="2" charset="0"/>
-      <p:bold r:id="rId24"/>
-      <p:boldItalic r:id="rId25"/>
+      <p:bold r:id="rId23"/>
+      <p:boldItalic r:id="rId24"/>
     </p:embeddedFont>
   </p:embeddedFontLst>
   <p:defaultTextStyle>
@@ -1086,90 +1085,6 @@
         <p:cNvPr id="1" name="">
           <a:extLst>
             <a:ext uri="{FF2B5EF4-FFF2-40B4-BE49-F238E27FC236}">
-              <a16:creationId xmlns:a16="http://schemas.microsoft.com/office/drawing/2014/main" id="{54443019-2625-40EE-6634-6B5FB7DE1DCD}"/>
-            </a:ext>
-          </a:extLst>
-        </p:cNvPr>
-        <p:cNvGrpSpPr/>
-        <p:nvPr/>
-      </p:nvGrpSpPr>
-      <p:grpSpPr>
-        <a:xfrm>
-          <a:off x="0" y="0"/>
-          <a:ext cx="0" cy="0"/>
-          <a:chOff x="0" y="0"/>
-          <a:chExt cx="0" cy="0"/>
-        </a:xfrm>
-      </p:grpSpPr>
-      <p:sp>
-        <p:nvSpPr>
-          <p:cNvPr id="2" name="Marcador de imagen de diapositiva 1">
-            <a:extLst>
-              <a:ext uri="{FF2B5EF4-FFF2-40B4-BE49-F238E27FC236}">
-                <a16:creationId xmlns:a16="http://schemas.microsoft.com/office/drawing/2014/main" id="{A25FED04-BFB7-8FB2-3058-29A57D19E6E5}"/>
-              </a:ext>
-            </a:extLst>
-          </p:cNvPr>
-          <p:cNvSpPr>
-            <a:spLocks noGrp="1" noRot="1" noChangeAspect="1"/>
-          </p:cNvSpPr>
-          <p:nvPr>
-            <p:ph type="sldImg"/>
-          </p:nvPr>
-        </p:nvSpPr>
-        <p:spPr>
-          <a:xfrm>
-            <a:off x="381000" y="685800"/>
-            <a:ext cx="6096000" cy="3429000"/>
-          </a:xfrm>
-        </p:spPr>
-      </p:sp>
-      <p:sp>
-        <p:nvSpPr>
-          <p:cNvPr id="3" name="Marcador de notas 2">
-            <a:extLst>
-              <a:ext uri="{FF2B5EF4-FFF2-40B4-BE49-F238E27FC236}">
-                <a16:creationId xmlns:a16="http://schemas.microsoft.com/office/drawing/2014/main" id="{B99AA7E0-B017-28AF-396B-DD9514FF0648}"/>
-              </a:ext>
-            </a:extLst>
-          </p:cNvPr>
-          <p:cNvSpPr>
-            <a:spLocks noGrp="1"/>
-          </p:cNvSpPr>
-          <p:nvPr>
-            <p:ph type="body" idx="1"/>
-          </p:nvPr>
-        </p:nvSpPr>
-        <p:spPr/>
-        <p:txBody>
-          <a:bodyPr/>
-          <a:lstStyle/>
-          <a:p>
-            <a:endParaRPr lang="es-MX" dirty="0"/>
-          </a:p>
-        </p:txBody>
-      </p:sp>
-    </p:spTree>
-    <p:extLst>
-      <p:ext uri="{BB962C8B-B14F-4D97-AF65-F5344CB8AC3E}">
-        <p14:creationId xmlns:p14="http://schemas.microsoft.com/office/powerpoint/2010/main" val="3315537473"/>
-      </p:ext>
-    </p:extLst>
-  </p:cSld>
-  <p:clrMapOvr>
-    <a:masterClrMapping/>
-  </p:clrMapOvr>
-</p:notes>
-</file>
-
-<file path=ppt/notesSlides/notesSlide6.xml><?xml version="1.0" encoding="utf-8"?>
-<p:notes xmlns:a="http://schemas.openxmlformats.org/drawingml/2006/main" xmlns:r="http://schemas.openxmlformats.org/officeDocument/2006/relationships" xmlns:p="http://schemas.openxmlformats.org/presentationml/2006/main">
-  <p:cSld>
-    <p:spTree>
-      <p:nvGrpSpPr>
-        <p:cNvPr id="1" name="">
-          <a:extLst>
-            <a:ext uri="{FF2B5EF4-FFF2-40B4-BE49-F238E27FC236}">
               <a16:creationId xmlns:a16="http://schemas.microsoft.com/office/drawing/2014/main" id="{357567EE-3B4E-8C48-2AAD-0C70B0A7FC91}"/>
             </a:ext>
           </a:extLst>
@@ -1246,7 +1161,7 @@
 </p:notes>
 </file>
 
-<file path=ppt/notesSlides/notesSlide7.xml><?xml version="1.0" encoding="utf-8"?>
+<file path=ppt/notesSlides/notesSlide6.xml><?xml version="1.0" encoding="utf-8"?>
 <p:notes xmlns:a="http://schemas.openxmlformats.org/drawingml/2006/main" xmlns:r="http://schemas.openxmlformats.org/officeDocument/2006/relationships" xmlns:p="http://schemas.openxmlformats.org/presentationml/2006/main" showMasterSp="0" showMasterPhAnim="0">
   <p:cSld>
     <p:spTree>
@@ -6594,124 +6509,6 @@
     <p:bg>
       <p:bgPr>
         <a:solidFill>
-          <a:srgbClr val="FAFAFA"/>
-        </a:solidFill>
-        <a:effectLst/>
-      </p:bgPr>
-    </p:bg>
-    <p:spTree>
-      <p:nvGrpSpPr>
-        <p:cNvPr id="1" name="">
-          <a:extLst>
-            <a:ext uri="{FF2B5EF4-FFF2-40B4-BE49-F238E27FC236}">
-              <a16:creationId xmlns:a16="http://schemas.microsoft.com/office/drawing/2014/main" id="{93B6DC8C-E619-F67B-9048-4615CF198885}"/>
-            </a:ext>
-          </a:extLst>
-        </p:cNvPr>
-        <p:cNvGrpSpPr/>
-        <p:nvPr/>
-      </p:nvGrpSpPr>
-      <p:grpSpPr>
-        <a:xfrm>
-          <a:off x="0" y="0"/>
-          <a:ext cx="0" cy="0"/>
-          <a:chOff x="0" y="0"/>
-          <a:chExt cx="0" cy="0"/>
-        </a:xfrm>
-      </p:grpSpPr>
-      <p:sp>
-        <p:nvSpPr>
-          <p:cNvPr id="7" name="CuadroTexto 6">
-            <a:extLst>
-              <a:ext uri="{FF2B5EF4-FFF2-40B4-BE49-F238E27FC236}">
-                <a16:creationId xmlns:a16="http://schemas.microsoft.com/office/drawing/2014/main" id="{C46A5360-EC76-283F-42C4-C3D1585636DD}"/>
-              </a:ext>
-            </a:extLst>
-          </p:cNvPr>
-          <p:cNvSpPr txBox="1"/>
-          <p:nvPr/>
-        </p:nvSpPr>
-        <p:spPr>
-          <a:xfrm>
-            <a:off x="908175" y="152426"/>
-            <a:ext cx="7254625" cy="369332"/>
-          </a:xfrm>
-          <a:prstGeom prst="rect">
-            <a:avLst/>
-          </a:prstGeom>
-          <a:noFill/>
-        </p:spPr>
-        <p:txBody>
-          <a:bodyPr wrap="square">
-            <a:spAutoFit/>
-          </a:bodyPr>
-          <a:lstStyle/>
-          <a:p>
-            <a:pPr algn="ctr">
-              <a:buNone/>
-            </a:pPr>
-            <a:r>
-              <a:rPr lang="es-MX" sz="1800" b="1" i="0" dirty="0">
-                <a:solidFill>
-                  <a:srgbClr val="000000"/>
-                </a:solidFill>
-                <a:effectLst/>
-                <a:latin typeface="Montserrat" pitchFamily="2" charset="0"/>
-              </a:rPr>
-              <a:t>Detalle de Notas en primeras planas</a:t>
-            </a:r>
-          </a:p>
-        </p:txBody>
-      </p:sp>
-      <p:pic>
-        <p:nvPicPr>
-          <p:cNvPr id="4" name="Imagen 3">
-            <a:extLst>
-              <a:ext uri="{FF2B5EF4-FFF2-40B4-BE49-F238E27FC236}">
-                <a16:creationId xmlns:a16="http://schemas.microsoft.com/office/drawing/2014/main" id="{C7B0FB47-D40E-F0C7-058D-24DB4FE61AC6}"/>
-              </a:ext>
-            </a:extLst>
-          </p:cNvPr>
-          <p:cNvPicPr>
-            <a:picLocks noChangeAspect="1"/>
-          </p:cNvPicPr>
-          <p:nvPr/>
-        </p:nvPicPr>
-        <p:blipFill>
-          <a:blip r:embed="rId3"/>
-          <a:stretch>
-            <a:fillRect/>
-          </a:stretch>
-        </p:blipFill>
-        <p:spPr>
-          <a:xfrm>
-            <a:off x="544512" y="1309688"/>
-            <a:ext cx="7981950" cy="2667000"/>
-          </a:xfrm>
-          <a:prstGeom prst="rect">
-            <a:avLst/>
-          </a:prstGeom>
-        </p:spPr>
-      </p:pic>
-    </p:spTree>
-    <p:extLst>
-      <p:ext uri="{BB962C8B-B14F-4D97-AF65-F5344CB8AC3E}">
-        <p14:creationId xmlns:p14="http://schemas.microsoft.com/office/powerpoint/2010/main" val="2442859157"/>
-      </p:ext>
-    </p:extLst>
-  </p:cSld>
-  <p:clrMapOvr>
-    <a:masterClrMapping/>
-  </p:clrMapOvr>
-</p:sld>
-</file>
-
-<file path=ppt/slides/slide11.xml><?xml version="1.0" encoding="utf-8"?>
-<p:sld xmlns:a="http://schemas.openxmlformats.org/drawingml/2006/main" xmlns:r="http://schemas.openxmlformats.org/officeDocument/2006/relationships" xmlns:p="http://schemas.openxmlformats.org/presentationml/2006/main">
-  <p:cSld>
-    <p:bg>
-      <p:bgPr>
-        <a:solidFill>
           <a:srgbClr val="F8F9FA"/>
         </a:solidFill>
         <a:effectLst/>
@@ -6818,7 +6615,7 @@
 </p:sld>
 </file>
 
-<file path=ppt/slides/slide12.xml><?xml version="1.0" encoding="utf-8"?>
+<file path=ppt/slides/slide11.xml><?xml version="1.0" encoding="utf-8"?>
 <p:sld xmlns:a="http://schemas.openxmlformats.org/drawingml/2006/main" xmlns:r="http://schemas.openxmlformats.org/officeDocument/2006/relationships" xmlns:p="http://schemas.openxmlformats.org/presentationml/2006/main">
   <p:cSld>
     <p:bg>
@@ -6924,7 +6721,7 @@
 </p:sld>
 </file>
 
-<file path=ppt/slides/slide13.xml><?xml version="1.0" encoding="utf-8"?>
+<file path=ppt/slides/slide12.xml><?xml version="1.0" encoding="utf-8"?>
 <p:sld xmlns:a="http://schemas.openxmlformats.org/drawingml/2006/main" xmlns:r="http://schemas.openxmlformats.org/officeDocument/2006/relationships" xmlns:p="http://schemas.openxmlformats.org/presentationml/2006/main">
   <p:cSld>
     <p:bg>
@@ -7030,7 +6827,7 @@
 </p:sld>
 </file>
 
-<file path=ppt/slides/slide14.xml><?xml version="1.0" encoding="utf-8"?>
+<file path=ppt/slides/slide13.xml><?xml version="1.0" encoding="utf-8"?>
 <p:sld xmlns:a="http://schemas.openxmlformats.org/drawingml/2006/main" xmlns:r="http://schemas.openxmlformats.org/officeDocument/2006/relationships" xmlns:p="http://schemas.openxmlformats.org/presentationml/2006/main">
   <p:cSld>
     <p:bg>
@@ -7136,7 +6933,7 @@
 </p:sld>
 </file>
 
-<file path=ppt/slides/slide15.xml><?xml version="1.0" encoding="utf-8"?>
+<file path=ppt/slides/slide14.xml><?xml version="1.0" encoding="utf-8"?>
 <p:sld xmlns:a="http://schemas.openxmlformats.org/drawingml/2006/main" xmlns:r="http://schemas.openxmlformats.org/officeDocument/2006/relationships" xmlns:p="http://schemas.openxmlformats.org/presentationml/2006/main">
   <p:cSld>
     <p:bg>
@@ -7248,7 +7045,7 @@
 </p:sld>
 </file>
 
-<file path=ppt/slides/slide16.xml><?xml version="1.0" encoding="utf-8"?>
+<file path=ppt/slides/slide15.xml><?xml version="1.0" encoding="utf-8"?>
 <p:sld xmlns:a="http://schemas.openxmlformats.org/drawingml/2006/main" xmlns:r="http://schemas.openxmlformats.org/officeDocument/2006/relationships" xmlns:p="http://schemas.openxmlformats.org/presentationml/2006/main">
   <p:cSld>
     <p:bg>
@@ -7360,7 +7157,7 @@
 </p:sld>
 </file>
 
-<file path=ppt/slides/slide17.xml><?xml version="1.0" encoding="utf-8"?>
+<file path=ppt/slides/slide16.xml><?xml version="1.0" encoding="utf-8"?>
 <p:sld xmlns:a="http://schemas.openxmlformats.org/drawingml/2006/main" xmlns:r="http://schemas.openxmlformats.org/officeDocument/2006/relationships" xmlns:p="http://schemas.openxmlformats.org/presentationml/2006/main">
   <p:cSld>
     <p:spTree>
@@ -7491,6 +7288,36 @@
           </a:p>
         </p:txBody>
       </p:sp>
+      <p:pic>
+        <p:nvPicPr>
+          <p:cNvPr id="3" name="Imagen 2">
+            <a:extLst>
+              <a:ext uri="{FF2B5EF4-FFF2-40B4-BE49-F238E27FC236}">
+                <a16:creationId xmlns:a16="http://schemas.microsoft.com/office/drawing/2014/main" id="{E443BCB1-AC7F-BE06-72EE-86F9ECE2F625}"/>
+              </a:ext>
+            </a:extLst>
+          </p:cNvPr>
+          <p:cNvPicPr>
+            <a:picLocks noChangeAspect="1"/>
+          </p:cNvPicPr>
+          <p:nvPr/>
+        </p:nvPicPr>
+        <p:blipFill>
+          <a:blip r:embed="rId3"/>
+          <a:stretch>
+            <a:fillRect/>
+          </a:stretch>
+        </p:blipFill>
+        <p:spPr>
+          <a:xfrm>
+            <a:off x="0" y="889476"/>
+            <a:ext cx="9144000" cy="3507423"/>
+          </a:xfrm>
+          <a:prstGeom prst="rect">
+            <a:avLst/>
+          </a:prstGeom>
+        </p:spPr>
+      </p:pic>
     </p:spTree>
     <p:extLst>
       <p:ext uri="{BB962C8B-B14F-4D97-AF65-F5344CB8AC3E}">
@@ -7577,10 +7404,10 @@
       </p:sp>
       <p:pic>
         <p:nvPicPr>
-          <p:cNvPr id="5" name="Imagen 4">
+          <p:cNvPr id="3" name="Imagen 2">
             <a:extLst>
               <a:ext uri="{FF2B5EF4-FFF2-40B4-BE49-F238E27FC236}">
-                <a16:creationId xmlns:a16="http://schemas.microsoft.com/office/drawing/2014/main" id="{0ADDCB66-FE66-77F1-311B-D660E6527003}"/>
+                <a16:creationId xmlns:a16="http://schemas.microsoft.com/office/drawing/2014/main" id="{E2F1780D-D922-2306-622C-21AAFAD4CE4F}"/>
               </a:ext>
             </a:extLst>
           </p:cNvPr>
@@ -7597,8 +7424,8 @@
         </p:blipFill>
         <p:spPr>
           <a:xfrm>
-            <a:off x="0" y="1466811"/>
-            <a:ext cx="9144000" cy="2469078"/>
+            <a:off x="0" y="1398753"/>
+            <a:ext cx="9144000" cy="2488870"/>
           </a:xfrm>
           <a:prstGeom prst="rect">
             <a:avLst/>
@@ -7691,10 +7518,10 @@
       </p:sp>
       <p:pic>
         <p:nvPicPr>
-          <p:cNvPr id="4" name="Imagen 3">
+          <p:cNvPr id="2" name="Imagen 1">
             <a:extLst>
               <a:ext uri="{FF2B5EF4-FFF2-40B4-BE49-F238E27FC236}">
-                <a16:creationId xmlns:a16="http://schemas.microsoft.com/office/drawing/2014/main" id="{8DC3FA3E-7856-74E4-5537-0BD14495827E}"/>
+                <a16:creationId xmlns:a16="http://schemas.microsoft.com/office/drawing/2014/main" id="{C9CFA904-D3C3-DF0B-CA85-1748F5D92284}"/>
               </a:ext>
             </a:extLst>
           </p:cNvPr>
@@ -7801,10 +7628,10 @@
       </p:sp>
       <p:pic>
         <p:nvPicPr>
-          <p:cNvPr id="3" name="Imagen 2">
+          <p:cNvPr id="4" name="Imagen 3">
             <a:extLst>
               <a:ext uri="{FF2B5EF4-FFF2-40B4-BE49-F238E27FC236}">
-                <a16:creationId xmlns:a16="http://schemas.microsoft.com/office/drawing/2014/main" id="{CF104464-ACE9-B787-39B6-7B19B3F3D29D}"/>
+                <a16:creationId xmlns:a16="http://schemas.microsoft.com/office/drawing/2014/main" id="{9105F707-48F9-7335-5D1A-5EBE80D771D1}"/>
               </a:ext>
             </a:extLst>
           </p:cNvPr>
@@ -7821,8 +7648,38 @@
         </p:blipFill>
         <p:spPr>
           <a:xfrm>
-            <a:off x="576262" y="1247775"/>
-            <a:ext cx="7991475" cy="2790825"/>
+            <a:off x="373062" y="636712"/>
+            <a:ext cx="8324850" cy="1666875"/>
+          </a:xfrm>
+          <a:prstGeom prst="rect">
+            <a:avLst/>
+          </a:prstGeom>
+        </p:spPr>
+      </p:pic>
+      <p:pic>
+        <p:nvPicPr>
+          <p:cNvPr id="6" name="Imagen 5">
+            <a:extLst>
+              <a:ext uri="{FF2B5EF4-FFF2-40B4-BE49-F238E27FC236}">
+                <a16:creationId xmlns:a16="http://schemas.microsoft.com/office/drawing/2014/main" id="{AF983E67-19C9-9B1D-1663-21961A2FAB73}"/>
+              </a:ext>
+            </a:extLst>
+          </p:cNvPr>
+          <p:cNvPicPr>
+            <a:picLocks noChangeAspect="1"/>
+          </p:cNvPicPr>
+          <p:nvPr/>
+        </p:nvPicPr>
+        <p:blipFill>
+          <a:blip r:embed="rId4"/>
+          <a:stretch>
+            <a:fillRect/>
+          </a:stretch>
+        </p:blipFill>
+        <p:spPr>
+          <a:xfrm>
+            <a:off x="0" y="2899297"/>
+            <a:ext cx="9144000" cy="1936906"/>
           </a:xfrm>
           <a:prstGeom prst="rect">
             <a:avLst/>
@@ -7843,116 +7700,6 @@
 </file>
 
 <file path=ppt/slides/slide6.xml><?xml version="1.0" encoding="utf-8"?>
-<p:sld xmlns:a="http://schemas.openxmlformats.org/drawingml/2006/main" xmlns:r="http://schemas.openxmlformats.org/officeDocument/2006/relationships" xmlns:p="http://schemas.openxmlformats.org/presentationml/2006/main">
-  <p:cSld>
-    <p:spTree>
-      <p:nvGrpSpPr>
-        <p:cNvPr id="1" name="">
-          <a:extLst>
-            <a:ext uri="{FF2B5EF4-FFF2-40B4-BE49-F238E27FC236}">
-              <a16:creationId xmlns:a16="http://schemas.microsoft.com/office/drawing/2014/main" id="{F83748F2-AC91-4618-4B1E-EDEA48E5B803}"/>
-            </a:ext>
-          </a:extLst>
-        </p:cNvPr>
-        <p:cNvGrpSpPr/>
-        <p:nvPr/>
-      </p:nvGrpSpPr>
-      <p:grpSpPr>
-        <a:xfrm>
-          <a:off x="0" y="0"/>
-          <a:ext cx="0" cy="0"/>
-          <a:chOff x="0" y="0"/>
-          <a:chExt cx="0" cy="0"/>
-        </a:xfrm>
-      </p:grpSpPr>
-      <p:sp>
-        <p:nvSpPr>
-          <p:cNvPr id="7" name="CuadroTexto 6">
-            <a:extLst>
-              <a:ext uri="{FF2B5EF4-FFF2-40B4-BE49-F238E27FC236}">
-                <a16:creationId xmlns:a16="http://schemas.microsoft.com/office/drawing/2014/main" id="{6AF79308-FA69-6F6E-6CD1-F44045374CDD}"/>
-              </a:ext>
-            </a:extLst>
-          </p:cNvPr>
-          <p:cNvSpPr txBox="1"/>
-          <p:nvPr/>
-        </p:nvSpPr>
-        <p:spPr>
-          <a:xfrm>
-            <a:off x="908175" y="152426"/>
-            <a:ext cx="7254625" cy="369332"/>
-          </a:xfrm>
-          <a:prstGeom prst="rect">
-            <a:avLst/>
-          </a:prstGeom>
-          <a:noFill/>
-        </p:spPr>
-        <p:txBody>
-          <a:bodyPr wrap="square">
-            <a:spAutoFit/>
-          </a:bodyPr>
-          <a:lstStyle/>
-          <a:p>
-            <a:pPr algn="ctr">
-              <a:buNone/>
-            </a:pPr>
-            <a:r>
-              <a:rPr lang="es-MX" sz="1800" b="1" i="0" dirty="0">
-                <a:solidFill>
-                  <a:srgbClr val="000000"/>
-                </a:solidFill>
-                <a:effectLst/>
-                <a:latin typeface="Montserrat" pitchFamily="2" charset="0"/>
-              </a:rPr>
-              <a:t>Detalle de Notas en primeras planas</a:t>
-            </a:r>
-          </a:p>
-        </p:txBody>
-      </p:sp>
-      <p:pic>
-        <p:nvPicPr>
-          <p:cNvPr id="4" name="Imagen 3">
-            <a:extLst>
-              <a:ext uri="{FF2B5EF4-FFF2-40B4-BE49-F238E27FC236}">
-                <a16:creationId xmlns:a16="http://schemas.microsoft.com/office/drawing/2014/main" id="{6248C87D-F5C5-900A-ADC8-F1D5CE7A2443}"/>
-              </a:ext>
-            </a:extLst>
-          </p:cNvPr>
-          <p:cNvPicPr>
-            <a:picLocks noChangeAspect="1"/>
-          </p:cNvPicPr>
-          <p:nvPr/>
-        </p:nvPicPr>
-        <p:blipFill>
-          <a:blip r:embed="rId3"/>
-          <a:stretch>
-            <a:fillRect/>
-          </a:stretch>
-        </p:blipFill>
-        <p:spPr>
-          <a:xfrm>
-            <a:off x="539749" y="933450"/>
-            <a:ext cx="7991475" cy="3419475"/>
-          </a:xfrm>
-          <a:prstGeom prst="rect">
-            <a:avLst/>
-          </a:prstGeom>
-        </p:spPr>
-      </p:pic>
-    </p:spTree>
-    <p:extLst>
-      <p:ext uri="{BB962C8B-B14F-4D97-AF65-F5344CB8AC3E}">
-        <p14:creationId xmlns:p14="http://schemas.microsoft.com/office/powerpoint/2010/main" val="2045189621"/>
-      </p:ext>
-    </p:extLst>
-  </p:cSld>
-  <p:clrMapOvr>
-    <a:masterClrMapping/>
-  </p:clrMapOvr>
-</p:sld>
-</file>
-
-<file path=ppt/slides/slide7.xml><?xml version="1.0" encoding="utf-8"?>
 <p:sld xmlns:a="http://schemas.openxmlformats.org/drawingml/2006/main" xmlns:r="http://schemas.openxmlformats.org/officeDocument/2006/relationships" xmlns:p="http://schemas.openxmlformats.org/presentationml/2006/main">
   <p:cSld>
     <p:bg>
@@ -8023,36 +7770,44 @@
           </a:p>
         </p:txBody>
       </p:sp>
-      <p:pic>
-        <p:nvPicPr>
-          <p:cNvPr id="6" name="Imagen 5">
+      <p:sp>
+        <p:nvSpPr>
+          <p:cNvPr id="2" name="CuadroTexto 1">
             <a:extLst>
               <a:ext uri="{FF2B5EF4-FFF2-40B4-BE49-F238E27FC236}">
-                <a16:creationId xmlns:a16="http://schemas.microsoft.com/office/drawing/2014/main" id="{B688F907-AA69-8D62-09B0-7B145F3E1B5C}"/>
+                <a16:creationId xmlns:a16="http://schemas.microsoft.com/office/drawing/2014/main" id="{C2B896BA-3FFA-CC2F-678A-2739DE586375}"/>
               </a:ext>
             </a:extLst>
           </p:cNvPr>
-          <p:cNvPicPr>
-            <a:picLocks noChangeAspect="1"/>
-          </p:cNvPicPr>
+          <p:cNvSpPr txBox="1"/>
           <p:nvPr/>
-        </p:nvPicPr>
-        <p:blipFill>
-          <a:blip r:embed="rId2"/>
-          <a:stretch>
-            <a:fillRect/>
-          </a:stretch>
-        </p:blipFill>
+        </p:nvSpPr>
         <p:spPr>
           <a:xfrm>
-            <a:off x="0" y="924372"/>
-            <a:ext cx="9144000" cy="3437631"/>
+            <a:off x="291820" y="2310140"/>
+            <a:ext cx="8560357" cy="400110"/>
           </a:xfrm>
           <a:prstGeom prst="rect">
             <a:avLst/>
           </a:prstGeom>
+          <a:noFill/>
         </p:spPr>
-      </p:pic>
+        <p:txBody>
+          <a:bodyPr wrap="none" rtlCol="0">
+            <a:spAutoFit/>
+          </a:bodyPr>
+          <a:lstStyle/>
+          <a:p>
+            <a:pPr algn="ctr"/>
+            <a:r>
+              <a:rPr lang="es-MX" sz="2000" b="1" dirty="0">
+                <a:latin typeface="Montserrat" panose="00000500000000000000" pitchFamily="2" charset="0"/>
+              </a:rPr>
+              <a:t>No se registró información del gobernador en primeras planas</a:t>
+            </a:r>
+          </a:p>
+        </p:txBody>
+      </p:sp>
     </p:spTree>
     <p:extLst>
       <p:ext uri="{BB962C8B-B14F-4D97-AF65-F5344CB8AC3E}">
@@ -8066,7 +7821,7 @@
 </p:sld>
 </file>
 
-<file path=ppt/slides/slide8.xml><?xml version="1.0" encoding="utf-8"?>
+<file path=ppt/slides/slide7.xml><?xml version="1.0" encoding="utf-8"?>
 <p:sld xmlns:a="http://schemas.openxmlformats.org/drawingml/2006/main" xmlns:r="http://schemas.openxmlformats.org/officeDocument/2006/relationships" xmlns:p="http://schemas.openxmlformats.org/presentationml/2006/main">
   <p:cSld>
     <p:bg>
@@ -8137,36 +7892,44 @@
           </a:p>
         </p:txBody>
       </p:sp>
-      <p:pic>
-        <p:nvPicPr>
-          <p:cNvPr id="3" name="Imagen 2">
+      <p:sp>
+        <p:nvSpPr>
+          <p:cNvPr id="4" name="CuadroTexto 3">
             <a:extLst>
               <a:ext uri="{FF2B5EF4-FFF2-40B4-BE49-F238E27FC236}">
-                <a16:creationId xmlns:a16="http://schemas.microsoft.com/office/drawing/2014/main" id="{3562395B-2034-66C5-2B05-D715ECFF11E7}"/>
+                <a16:creationId xmlns:a16="http://schemas.microsoft.com/office/drawing/2014/main" id="{C59C9859-EFF0-9479-71AF-50F814CCD283}"/>
               </a:ext>
             </a:extLst>
           </p:cNvPr>
-          <p:cNvPicPr>
-            <a:picLocks noChangeAspect="1"/>
-          </p:cNvPicPr>
+          <p:cNvSpPr txBox="1"/>
           <p:nvPr/>
-        </p:nvPicPr>
-        <p:blipFill>
-          <a:blip r:embed="rId2"/>
-          <a:stretch>
-            <a:fillRect/>
-          </a:stretch>
-        </p:blipFill>
+        </p:nvSpPr>
         <p:spPr>
           <a:xfrm>
-            <a:off x="1143000" y="954107"/>
-            <a:ext cx="6858000" cy="3456495"/>
+            <a:off x="291820" y="2310140"/>
+            <a:ext cx="8560357" cy="400110"/>
           </a:xfrm>
           <a:prstGeom prst="rect">
             <a:avLst/>
           </a:prstGeom>
+          <a:noFill/>
         </p:spPr>
-      </p:pic>
+        <p:txBody>
+          <a:bodyPr wrap="none" rtlCol="0">
+            <a:spAutoFit/>
+          </a:bodyPr>
+          <a:lstStyle/>
+          <a:p>
+            <a:pPr algn="ctr"/>
+            <a:r>
+              <a:rPr lang="es-MX" sz="2000" b="1" dirty="0">
+                <a:latin typeface="Montserrat" panose="00000500000000000000" pitchFamily="2" charset="0"/>
+              </a:rPr>
+              <a:t>No se registró información del gobernador en primeras planas</a:t>
+            </a:r>
+          </a:p>
+        </p:txBody>
+      </p:sp>
     </p:spTree>
     <p:extLst>
       <p:ext uri="{BB962C8B-B14F-4D97-AF65-F5344CB8AC3E}">
@@ -8180,7 +7943,7 @@
 </p:sld>
 </file>
 
-<file path=ppt/slides/slide9.xml><?xml version="1.0" encoding="utf-8"?>
+<file path=ppt/slides/slide8.xml><?xml version="1.0" encoding="utf-8"?>
 <p:sld xmlns:a="http://schemas.openxmlformats.org/drawingml/2006/main" xmlns:r="http://schemas.openxmlformats.org/officeDocument/2006/relationships" xmlns:p="http://schemas.openxmlformats.org/presentationml/2006/main">
   <p:cSld>
     <p:bg>
@@ -8251,40 +8014,174 @@
           </a:p>
         </p:txBody>
       </p:sp>
-      <p:pic>
-        <p:nvPicPr>
-          <p:cNvPr id="3" name="Imagen 2">
+      <p:sp>
+        <p:nvSpPr>
+          <p:cNvPr id="4" name="CuadroTexto 3">
             <a:extLst>
               <a:ext uri="{FF2B5EF4-FFF2-40B4-BE49-F238E27FC236}">
-                <a16:creationId xmlns:a16="http://schemas.microsoft.com/office/drawing/2014/main" id="{B230EB3F-21DF-6F00-439A-36AB1C0CAEC7}"/>
+                <a16:creationId xmlns:a16="http://schemas.microsoft.com/office/drawing/2014/main" id="{9F403917-C4DD-B996-76B2-7FF2980DC0B9}"/>
               </a:ext>
             </a:extLst>
           </p:cNvPr>
-          <p:cNvPicPr>
-            <a:picLocks noChangeAspect="1"/>
-          </p:cNvPicPr>
+          <p:cNvSpPr txBox="1"/>
           <p:nvPr/>
-        </p:nvPicPr>
-        <p:blipFill>
-          <a:blip r:embed="rId2"/>
-          <a:stretch>
-            <a:fillRect/>
-          </a:stretch>
-        </p:blipFill>
+        </p:nvSpPr>
         <p:spPr>
           <a:xfrm>
-            <a:off x="1106488" y="914940"/>
-            <a:ext cx="6858000" cy="3456495"/>
+            <a:off x="291820" y="2310140"/>
+            <a:ext cx="8560357" cy="400110"/>
           </a:xfrm>
           <a:prstGeom prst="rect">
             <a:avLst/>
           </a:prstGeom>
+          <a:noFill/>
         </p:spPr>
-      </p:pic>
+        <p:txBody>
+          <a:bodyPr wrap="none" rtlCol="0">
+            <a:spAutoFit/>
+          </a:bodyPr>
+          <a:lstStyle/>
+          <a:p>
+            <a:pPr algn="ctr"/>
+            <a:r>
+              <a:rPr lang="es-MX" sz="2000" b="1" dirty="0">
+                <a:latin typeface="Montserrat" panose="00000500000000000000" pitchFamily="2" charset="0"/>
+              </a:rPr>
+              <a:t>No se registró información del gobernador en primeras planas</a:t>
+            </a:r>
+          </a:p>
+        </p:txBody>
+      </p:sp>
     </p:spTree>
     <p:extLst>
       <p:ext uri="{BB962C8B-B14F-4D97-AF65-F5344CB8AC3E}">
         <p14:creationId xmlns:p14="http://schemas.microsoft.com/office/powerpoint/2010/main" val="3736623944"/>
+      </p:ext>
+    </p:extLst>
+  </p:cSld>
+  <p:clrMapOvr>
+    <a:masterClrMapping/>
+  </p:clrMapOvr>
+</p:sld>
+</file>
+
+<file path=ppt/slides/slide9.xml><?xml version="1.0" encoding="utf-8"?>
+<p:sld xmlns:a="http://schemas.openxmlformats.org/drawingml/2006/main" xmlns:r="http://schemas.openxmlformats.org/officeDocument/2006/relationships" xmlns:p="http://schemas.openxmlformats.org/presentationml/2006/main">
+  <p:cSld>
+    <p:bg>
+      <p:bgPr>
+        <a:solidFill>
+          <a:srgbClr val="FAFAFA"/>
+        </a:solidFill>
+        <a:effectLst/>
+      </p:bgPr>
+    </p:bg>
+    <p:spTree>
+      <p:nvGrpSpPr>
+        <p:cNvPr id="1" name="">
+          <a:extLst>
+            <a:ext uri="{FF2B5EF4-FFF2-40B4-BE49-F238E27FC236}">
+              <a16:creationId xmlns:a16="http://schemas.microsoft.com/office/drawing/2014/main" id="{93B6DC8C-E619-F67B-9048-4615CF198885}"/>
+            </a:ext>
+          </a:extLst>
+        </p:cNvPr>
+        <p:cNvGrpSpPr/>
+        <p:nvPr/>
+      </p:nvGrpSpPr>
+      <p:grpSpPr>
+        <a:xfrm>
+          <a:off x="0" y="0"/>
+          <a:ext cx="0" cy="0"/>
+          <a:chOff x="0" y="0"/>
+          <a:chExt cx="0" cy="0"/>
+        </a:xfrm>
+      </p:grpSpPr>
+      <p:sp>
+        <p:nvSpPr>
+          <p:cNvPr id="7" name="CuadroTexto 6">
+            <a:extLst>
+              <a:ext uri="{FF2B5EF4-FFF2-40B4-BE49-F238E27FC236}">
+                <a16:creationId xmlns:a16="http://schemas.microsoft.com/office/drawing/2014/main" id="{C46A5360-EC76-283F-42C4-C3D1585636DD}"/>
+              </a:ext>
+            </a:extLst>
+          </p:cNvPr>
+          <p:cNvSpPr txBox="1"/>
+          <p:nvPr/>
+        </p:nvSpPr>
+        <p:spPr>
+          <a:xfrm>
+            <a:off x="908175" y="152426"/>
+            <a:ext cx="7254625" cy="369332"/>
+          </a:xfrm>
+          <a:prstGeom prst="rect">
+            <a:avLst/>
+          </a:prstGeom>
+          <a:noFill/>
+        </p:spPr>
+        <p:txBody>
+          <a:bodyPr wrap="square">
+            <a:spAutoFit/>
+          </a:bodyPr>
+          <a:lstStyle/>
+          <a:p>
+            <a:pPr algn="ctr">
+              <a:buNone/>
+            </a:pPr>
+            <a:r>
+              <a:rPr lang="es-MX" sz="1800" b="1" i="0" dirty="0">
+                <a:solidFill>
+                  <a:srgbClr val="000000"/>
+                </a:solidFill>
+                <a:effectLst/>
+                <a:latin typeface="Montserrat" pitchFamily="2" charset="0"/>
+              </a:rPr>
+              <a:t>Detalle de Notas en primeras planas</a:t>
+            </a:r>
+          </a:p>
+        </p:txBody>
+      </p:sp>
+      <p:sp>
+        <p:nvSpPr>
+          <p:cNvPr id="3" name="CuadroTexto 2">
+            <a:extLst>
+              <a:ext uri="{FF2B5EF4-FFF2-40B4-BE49-F238E27FC236}">
+                <a16:creationId xmlns:a16="http://schemas.microsoft.com/office/drawing/2014/main" id="{28D683E5-2D0E-3757-729C-73AB8C8AB536}"/>
+              </a:ext>
+            </a:extLst>
+          </p:cNvPr>
+          <p:cNvSpPr txBox="1"/>
+          <p:nvPr/>
+        </p:nvSpPr>
+        <p:spPr>
+          <a:xfrm>
+            <a:off x="291820" y="2310140"/>
+            <a:ext cx="8560357" cy="400110"/>
+          </a:xfrm>
+          <a:prstGeom prst="rect">
+            <a:avLst/>
+          </a:prstGeom>
+          <a:noFill/>
+        </p:spPr>
+        <p:txBody>
+          <a:bodyPr wrap="none" rtlCol="0">
+            <a:spAutoFit/>
+          </a:bodyPr>
+          <a:lstStyle/>
+          <a:p>
+            <a:pPr algn="ctr"/>
+            <a:r>
+              <a:rPr lang="es-MX" sz="2000" b="1" dirty="0">
+                <a:latin typeface="Montserrat" panose="00000500000000000000" pitchFamily="2" charset="0"/>
+              </a:rPr>
+              <a:t>No se registró información del gobernador en primeras planas</a:t>
+            </a:r>
+          </a:p>
+        </p:txBody>
+      </p:sp>
+    </p:spTree>
+    <p:extLst>
+      <p:ext uri="{BB962C8B-B14F-4D97-AF65-F5344CB8AC3E}">
+        <p14:creationId xmlns:p14="http://schemas.microsoft.com/office/powerpoint/2010/main" val="2442859157"/>
       </p:ext>
     </p:extLst>
   </p:cSld>
